--- a/dist/초5/사회·역사/역사와생활/초5_사회·역사_역사와생활_02_삼국과남북국_학생용.pptx
+++ b/dist/초5/사회·역사/역사와생활/초5_사회·역사_역사와생활_02_삼국과남북국_학생용.pptx
@@ -119,13 +119,13 @@
   <p:extLst>
     <p:ext uri="{521415D9-36F7-43E2-AB2F-B90AF26B5E84}">
       <p14:sectionLst xmlns:p14="http://schemas.microsoft.com/office/powerpoint/2010/main">
-        <p14:section name="도입" id="{427f60d1-264e-0042-347c-efcb09d33280}">
+        <p14:section name="도입" id="{e2ce7024-b774-7851-d937-062686c9e2c5}">
           <p14:sldIdLst>
             <p14:sldId id="256"/>
             <p14:sldId id="257"/>
           </p14:sldIdLst>
         </p14:section>
-        <p14:section name="개념" id="{1523010f-1dca-4524-102d-9668fe3040f0}">
+        <p14:section name="개념" id="{4133e266-9e7f-cd23-c1bd-0647c355a208}">
           <p14:sldIdLst>
             <p14:sldId id="258"/>
             <p14:sldId id="259"/>
@@ -134,30 +134,30 @@
             <p14:sldId id="263"/>
           </p14:sldIdLst>
         </p14:section>
-        <p14:section name="연습" id="{e4365d78-93bf-ee19-a7de-2a791d662462}">
+        <p14:section name="연습" id="{5e7e40c3-41d7-2086-d98b-69e8c3c08701}">
           <p14:sldIdLst>
             <p14:sldId id="261"/>
             <p14:sldId id="264"/>
             <p14:sldId id="265"/>
           </p14:sldIdLst>
         </p14:section>
-        <p14:section name="개념" id="{ad79a959-67d6-b320-058c-10bca678a020}">
+        <p14:section name="개념" id="{410e4bc9-c46a-9d69-d6fb-7d30ffe69b88}">
           <p14:sldIdLst/>
         </p14:section>
-        <p14:section name="연습" id="{840e052f-ab99-f18f-d962-a2135ba7b08c}">
+        <p14:section name="연습" id="{f51c9d33-f9e1-76dc-f44f-e60f2996536e}">
           <p14:sldIdLst/>
         </p14:section>
-        <p14:section name="확인" id="{0674dd0d-c209-bdb4-5a82-90811470c394}">
+        <p14:section name="확인" id="{94954063-d3e1-49bc-5c5e-3892cb206e44}">
           <p14:sldIdLst>
             <p14:sldId id="266"/>
           </p14:sldIdLst>
         </p14:section>
-        <p14:section name="정리" id="{47e5894a-36dc-f31e-e3e6-8c2742908d61}">
+        <p14:section name="정리" id="{fc0e01d0-7374-7997-715e-85454fe3ff7a}">
           <p14:sldIdLst>
             <p14:sldId id="267"/>
           </p14:sldIdLst>
         </p14:section>
-        <p14:section name="보충" id="{3d3da9e9-c8b5-1aa4-dfcc-551b508a5a23}">
+        <p14:section name="보충" id="{780892bb-6aa0-f73c-596e-c0b5f37ef598}">
           <p14:sldIdLst>
             <p14:sldId id="268"/>
           </p14:sldIdLst>
@@ -8678,7 +8678,28 @@
                           <a:ea typeface="맑은 고딕" pitchFamily="34" charset="-122"/>
                           <a:cs typeface="맑은 고딕" pitchFamily="34" charset="-120"/>
                         </a:rPr>
-                        <a:t>금동 대향로: 산·사람·동물을 섬세하게 새긴 향로</a:t>
+                        <a:t>금동 대향로</a:t>
+                      </a:r>
+                      <a:endParaRPr lang="en-US" sz="2400" dirty="0">
+                        <a:latin typeface="맑은 고딕" charset="0"/>
+                        <a:ea typeface="맑은 고딕" charset="0"/>
+                        <a:cs typeface="맑은 고딕" charset="0"/>
+                      </a:endParaRPr>
+                    </a:p>
+                    <a:p>
+                      <a:pPr eaLnBrk="0" algn="ctr" indent="0" marL="0">
+                        <a:buNone/>
+                      </a:pPr>
+                      <a:r>
+                        <a:rPr lang="en-US" sz="2400" dirty="0">
+                          <a:solidFill>
+                            <a:srgbClr val="1F2937"/>
+                          </a:solidFill>
+                          <a:latin typeface="맑은 고딕" pitchFamily="34" charset="0"/>
+                          <a:ea typeface="맑은 고딕" pitchFamily="34" charset="-122"/>
+                          <a:cs typeface="맑은 고딕" pitchFamily="34" charset="-120"/>
+                        </a:rPr>
+                        <a:t>산·사람·동물을 섬세하게 새김</a:t>
                       </a:r>
                       <a:endParaRPr lang="en-US" sz="2400" dirty="0">
                         <a:latin typeface="맑은 고딕" charset="0"/>
@@ -8746,7 +8767,28 @@
                           <a:ea typeface="맑은 고딕" pitchFamily="34" charset="-122"/>
                           <a:cs typeface="맑은 고딕" pitchFamily="34" charset="-120"/>
                         </a:rPr>
-                        <a:t>금속을 다루는 솜씨가 뛰어났어요.</a:t>
+                        <a:t>금속을 다루는 솜씨가</a:t>
+                      </a:r>
+                      <a:endParaRPr lang="en-US" sz="2400" dirty="0">
+                        <a:latin typeface="맑은 고딕" charset="0"/>
+                        <a:ea typeface="맑은 고딕" charset="0"/>
+                        <a:cs typeface="맑은 고딕" charset="0"/>
+                      </a:endParaRPr>
+                    </a:p>
+                    <a:p>
+                      <a:pPr eaLnBrk="0" algn="ctr" indent="0" marL="0">
+                        <a:buNone/>
+                      </a:pPr>
+                      <a:r>
+                        <a:rPr lang="en-US" sz="2400" dirty="0">
+                          <a:solidFill>
+                            <a:srgbClr val="1F2937"/>
+                          </a:solidFill>
+                          <a:latin typeface="맑은 고딕" pitchFamily="34" charset="0"/>
+                          <a:ea typeface="맑은 고딕" pitchFamily="34" charset="-122"/>
+                          <a:cs typeface="맑은 고딕" pitchFamily="34" charset="-120"/>
+                        </a:rPr>
+                        <a:t>뛰어났어요.</a:t>
                       </a:r>
                       <a:endParaRPr lang="en-US" sz="2400" dirty="0">
                         <a:latin typeface="맑은 고딕" charset="0"/>
@@ -8884,7 +8926,28 @@
                           <a:ea typeface="맑은 고딕" pitchFamily="34" charset="-122"/>
                           <a:cs typeface="맑은 고딕" pitchFamily="34" charset="-120"/>
                         </a:rPr>
-                        <a:t>금관: 나뭇가지와 사슴뿔 모양으로 꾸민 금 관</a:t>
+                        <a:t>금관</a:t>
+                      </a:r>
+                      <a:endParaRPr lang="en-US" sz="2400" dirty="0">
+                        <a:latin typeface="맑은 고딕" charset="0"/>
+                        <a:ea typeface="맑은 고딕" charset="0"/>
+                        <a:cs typeface="맑은 고딕" charset="0"/>
+                      </a:endParaRPr>
+                    </a:p>
+                    <a:p>
+                      <a:pPr eaLnBrk="0" algn="ctr" indent="0" marL="0">
+                        <a:buNone/>
+                      </a:pPr>
+                      <a:r>
+                        <a:rPr lang="en-US" sz="2400" dirty="0">
+                          <a:solidFill>
+                            <a:srgbClr val="1F2937"/>
+                          </a:solidFill>
+                          <a:latin typeface="맑은 고딕" pitchFamily="34" charset="0"/>
+                          <a:ea typeface="맑은 고딕" pitchFamily="34" charset="-122"/>
+                          <a:cs typeface="맑은 고딕" pitchFamily="34" charset="-120"/>
+                        </a:rPr>
+                        <a:t>나뭇가지·사슴뿔 모양 장식</a:t>
                       </a:r>
                       <a:endParaRPr lang="en-US" sz="2400" dirty="0">
                         <a:latin typeface="맑은 고딕" charset="0"/>

--- a/dist/초5/사회·역사/역사와생활/초5_사회·역사_역사와생활_02_삼국과남북국_학생용.pptx
+++ b/dist/초5/사회·역사/역사와생활/초5_사회·역사_역사와생활_02_삼국과남북국_학생용.pptx
@@ -119,13 +119,13 @@
   <p:extLst>
     <p:ext uri="{521415D9-36F7-43E2-AB2F-B90AF26B5E84}">
       <p14:sectionLst xmlns:p14="http://schemas.microsoft.com/office/powerpoint/2010/main">
-        <p14:section name="도입" id="{e2ce7024-b774-7851-d937-062686c9e2c5}">
+        <p14:section name="도입" id="{b3ebb152-1978-1527-7c84-343b8639340e}">
           <p14:sldIdLst>
             <p14:sldId id="256"/>
             <p14:sldId id="257"/>
           </p14:sldIdLst>
         </p14:section>
-        <p14:section name="개념" id="{4133e266-9e7f-cd23-c1bd-0647c355a208}">
+        <p14:section name="개념" id="{b70e9324-597a-7cb4-26c0-128a3490b803}">
           <p14:sldIdLst>
             <p14:sldId id="258"/>
             <p14:sldId id="259"/>
@@ -134,30 +134,30 @@
             <p14:sldId id="263"/>
           </p14:sldIdLst>
         </p14:section>
-        <p14:section name="연습" id="{5e7e40c3-41d7-2086-d98b-69e8c3c08701}">
+        <p14:section name="연습" id="{582adc71-267b-5b8e-649d-9334c71babd5}">
           <p14:sldIdLst>
             <p14:sldId id="261"/>
             <p14:sldId id="264"/>
             <p14:sldId id="265"/>
           </p14:sldIdLst>
         </p14:section>
-        <p14:section name="개념" id="{410e4bc9-c46a-9d69-d6fb-7d30ffe69b88}">
+        <p14:section name="개념" id="{d8121b38-8131-228a-73f9-6f996f735b86}">
           <p14:sldIdLst/>
         </p14:section>
-        <p14:section name="연습" id="{f51c9d33-f9e1-76dc-f44f-e60f2996536e}">
+        <p14:section name="연습" id="{922ff8dd-bff3-9ec6-7fcc-41bbfa061931}">
           <p14:sldIdLst/>
         </p14:section>
-        <p14:section name="확인" id="{94954063-d3e1-49bc-5c5e-3892cb206e44}">
+        <p14:section name="확인" id="{01a4d9ee-3cdb-9fa7-7b4e-f22ff3555960}">
           <p14:sldIdLst>
             <p14:sldId id="266"/>
           </p14:sldIdLst>
         </p14:section>
-        <p14:section name="정리" id="{fc0e01d0-7374-7997-715e-85454fe3ff7a}">
+        <p14:section name="정리" id="{315dfc85-9068-6f5c-3f11-d49e50a89a4b}">
           <p14:sldIdLst>
             <p14:sldId id="267"/>
           </p14:sldIdLst>
         </p14:section>
-        <p14:section name="보충" id="{780892bb-6aa0-f73c-596e-c0b5f37ef598}">
+        <p14:section name="보충" id="{754a0034-cf3f-d60c-3222-6323b301bc9d}">
           <p14:sldIdLst>
             <p14:sldId id="268"/>
           </p14:sldIdLst>

--- a/dist/초5/사회·역사/역사와생활/초5_사회·역사_역사와생활_02_삼국과남북국_학생용.pptx
+++ b/dist/초5/사회·역사/역사와생활/초5_사회·역사_역사와생활_02_삼국과남북국_학생용.pptx
@@ -119,13 +119,13 @@
   <p:extLst>
     <p:ext uri="{521415D9-36F7-43E2-AB2F-B90AF26B5E84}">
       <p14:sectionLst xmlns:p14="http://schemas.microsoft.com/office/powerpoint/2010/main">
-        <p14:section name="도입" id="{b3ebb152-1978-1527-7c84-343b8639340e}">
+        <p14:section name="도입" id="{71f9972b-b352-4f7c-d359-f6f8be1907a7}">
           <p14:sldIdLst>
             <p14:sldId id="256"/>
             <p14:sldId id="257"/>
           </p14:sldIdLst>
         </p14:section>
-        <p14:section name="개념" id="{b70e9324-597a-7cb4-26c0-128a3490b803}">
+        <p14:section name="개념" id="{fe184415-ced6-6c2c-842f-0910e8d90e1a}">
           <p14:sldIdLst>
             <p14:sldId id="258"/>
             <p14:sldId id="259"/>
@@ -134,30 +134,30 @@
             <p14:sldId id="263"/>
           </p14:sldIdLst>
         </p14:section>
-        <p14:section name="연습" id="{582adc71-267b-5b8e-649d-9334c71babd5}">
+        <p14:section name="연습" id="{13f35221-1f20-258c-f836-db5aa1598dd6}">
           <p14:sldIdLst>
             <p14:sldId id="261"/>
             <p14:sldId id="264"/>
             <p14:sldId id="265"/>
           </p14:sldIdLst>
         </p14:section>
-        <p14:section name="개념" id="{d8121b38-8131-228a-73f9-6f996f735b86}">
+        <p14:section name="개념" id="{9d571771-8c0d-aef8-4787-ef8da1b5fc0c}">
           <p14:sldIdLst/>
         </p14:section>
-        <p14:section name="연습" id="{922ff8dd-bff3-9ec6-7fcc-41bbfa061931}">
+        <p14:section name="연습" id="{e9ccb7b2-f476-1338-4739-41eca61d0d0d}">
           <p14:sldIdLst/>
         </p14:section>
-        <p14:section name="확인" id="{01a4d9ee-3cdb-9fa7-7b4e-f22ff3555960}">
+        <p14:section name="확인" id="{c785483f-e06a-4958-6962-b8bb8e28b1cd}">
           <p14:sldIdLst>
             <p14:sldId id="266"/>
           </p14:sldIdLst>
         </p14:section>
-        <p14:section name="정리" id="{315dfc85-9068-6f5c-3f11-d49e50a89a4b}">
+        <p14:section name="정리" id="{266b3a8e-7a65-8bc2-6a46-f8a128a3fd28}">
           <p14:sldIdLst>
             <p14:sldId id="267"/>
           </p14:sldIdLst>
         </p14:section>
-        <p14:section name="보충" id="{754a0034-cf3f-d60c-3222-6323b301bc9d}">
+        <p14:section name="보충" id="{2b6f0739-a86f-c2fd-0400-630c4a623ad1}">
           <p14:sldIdLst>
             <p14:sldId id="268"/>
           </p14:sldIdLst>
